--- a/carpentry/intake-142/PowerPoint/Day-12_2026-11-18_Week-4.pptx
+++ b/carpentry/intake-142/PowerPoint/Day-12_2026-11-18_Week-4.pptx
@@ -1092,7 +1092,7 @@
           <a:p/>
           <a:p>
             <a:r>
-              <a:t>Textbook page 94 gives 240 brackets, with fifteen percent set aside for another job. The whole is all 240 brackets. Fifteen percent becomes 0.15, so 240 times 0.15 equals 36 brackets. Check mentally: ten percent is 24, five percent is half of that, twelve, and 24 plus twelve is 36. What does 36 represent? The brackets set aside, not the number remaining. Read the requested quantity carefully before deciding whether another addition or subtraction is needed. Here the example asks only for the part.</a:t>
+              <a:t>Textbook page 140 gives 240 brackets, with fifteen percent set aside for another job. The whole is all 240 brackets. Fifteen percent becomes 0.15, so 240 times 0.15 equals 36 brackets. Check mentally: ten percent is 24, five percent is half of that, twelve, and 24 plus twelve is 36. What does 36 represent? The brackets set aside, not the number remaining. Read the requested quantity carefully before deciding whether another addition or subtraction is needed. Here the example asks only for the part.</a:t>
             </a:r>
           </a:p>
         </p:txBody>
@@ -2718,7 +2718,7 @@
           <a:p/>
           <a:p>
             <a:r>
-              <a:t>The calculator check on page 96 reaches the same adjusted amount: eighty-five increased by ten percent is 93.5 metres. The decimal-multiplier method is 85 times 1.10. Now check the purchase decision: sixteen six-metre lengths supply ninety-six metres, enough to cover 93.5. Fifteen lengths supply only ninety metres, which is short. Which check confirms that rounding up was needed? Comparing the available total with the adjusted requirement. A calculator can give 15.5833, but we must interpret that result as a count of whole lengths to buy.</a:t>
+              <a:t>The calculator check on page 142 reaches the same adjusted amount: eighty-five increased by ten percent is 93.5 metres. The decimal-multiplier method is 85 times 1.10. Now check the purchase decision: sixteen six-metre lengths supply ninety-six metres, enough to cover 93.5. Fifteen lengths supply only ninety metres, which is short. Which check confirms that rounding up was needed? Comparing the available total with the adjusted requirement. A calculator can give 15.5833, but we must interpret that result as a count of whole lengths to buy.</a:t>
             </a:r>
           </a:p>
         </p:txBody>
@@ -5480,7 +5480,7 @@
                 </a:solidFill>
                 <a:latin typeface="Arial"/>
               </a:rPr>
-              <a:t>Textbook  |  page 94</a:t>
+              <a:t>Textbook  |  page 140</a:t>
             </a:r>
           </a:p>
         </p:txBody>
@@ -5528,7 +5528,7 @@
                 </a:solidFill>
                 <a:latin typeface="Arial"/>
               </a:rPr>
-              <a:t>Textbook sections 6.1–6.3 pp.92–95; calculator percent p.35</a:t>
+              <a:t>Textbook sections 6.1–6.3 pp.138–142; calculator percent p.55</a:t>
             </a:r>
           </a:p>
         </p:txBody>
@@ -5600,7 +5600,7 @@
                 </a:solidFill>
                 <a:latin typeface="Arial"/>
               </a:rPr>
-              <a:t>Textbook p.94 • Example 6.3 — Compare the two calculator models</a:t>
+              <a:t>Textbook p.140 • Example 6.3 — Compare the two calculator models</a:t>
             </a:r>
           </a:p>
         </p:txBody>
@@ -6214,7 +6214,7 @@
                 </a:solidFill>
                 <a:latin typeface="Arial"/>
               </a:rPr>
-              <a:t>Textbook sections 6.1–6.3 pp.92–95; calculator percent p.35</a:t>
+              <a:t>Textbook sections 6.1–6.3 pp.138–142; calculator percent p.55</a:t>
             </a:r>
           </a:p>
         </p:txBody>
@@ -6972,7 +6972,7 @@
                 </a:solidFill>
                 <a:latin typeface="Arial"/>
               </a:rPr>
-              <a:t>Textbook sections 6.1–6.3 pp.92–95; calculator percent p.35</a:t>
+              <a:t>Textbook sections 6.1–6.3 pp.138–142; calculator percent p.55</a:t>
             </a:r>
           </a:p>
         </p:txBody>
@@ -7172,7 +7172,7 @@
                 </a:solidFill>
                 <a:latin typeface="Arial"/>
               </a:rPr>
-              <a:t>Resources: Exercise Book 6A Q1–10 (p.39); 6C Q1–2 (p.43)</a:t>
+              <a:t>Resources: Exercise Book 6A Q1–10 (p.55); 6C Q1–2 (p.59)</a:t>
             </a:r>
           </a:p>
         </p:txBody>
@@ -7786,7 +7786,7 @@
                 </a:solidFill>
                 <a:latin typeface="Arial"/>
               </a:rPr>
-              <a:t>Textbook sections 6.1–6.3 pp.92–95; calculator percent p.35</a:t>
+              <a:t>Textbook sections 6.1–6.3 pp.138–142; calculator percent p.55</a:t>
             </a:r>
           </a:p>
         </p:txBody>
@@ -8542,7 +8542,7 @@
                 </a:solidFill>
                 <a:latin typeface="Arial"/>
               </a:rPr>
-              <a:t>Textbook sections 6.1–6.3 pp.92–95; calculator percent p.35</a:t>
+              <a:t>Textbook sections 6.1–6.3 pp.138–142; calculator percent p.55</a:t>
             </a:r>
           </a:p>
         </p:txBody>
@@ -9276,7 +9276,7 @@
                 </a:solidFill>
                 <a:latin typeface="Arial"/>
               </a:rPr>
-              <a:t>Textbook sections 6.1–6.3 pp.92–95; calculator percent p.35</a:t>
+              <a:t>Textbook sections 6.1–6.3 pp.138–142; calculator percent p.55</a:t>
             </a:r>
           </a:p>
         </p:txBody>
@@ -9476,7 +9476,7 @@
                 </a:solidFill>
                 <a:latin typeface="Arial"/>
               </a:rPr>
-              <a:t>Resources: Exercise Book 6A Q1–10 (p.39); 6C Q1–2 (p.43)</a:t>
+              <a:t>Resources: Exercise Book 6A Q1–10 (p.55); 6C Q1–2 (p.59)</a:t>
             </a:r>
           </a:p>
         </p:txBody>
@@ -10090,7 +10090,7 @@
                 </a:solidFill>
                 <a:latin typeface="Arial"/>
               </a:rPr>
-              <a:t>Textbook sections 6.1–6.3 pp.92–95; calculator percent p.35</a:t>
+              <a:t>Textbook sections 6.1–6.3 pp.138–142; calculator percent p.55</a:t>
             </a:r>
           </a:p>
         </p:txBody>
@@ -10866,7 +10866,7 @@
                 </a:solidFill>
                 <a:latin typeface="Arial"/>
               </a:rPr>
-              <a:t>Textbook sections 6.1–6.3 pp.92–95; calculator percent p.35</a:t>
+              <a:t>Textbook sections 6.1–6.3 pp.138–142; calculator percent p.55</a:t>
             </a:r>
           </a:p>
         </p:txBody>
@@ -11825,7 +11825,7 @@
                 </a:solidFill>
                 <a:latin typeface="Arial"/>
               </a:rPr>
-              <a:t>Textbook sections 6.1–6.3 pp.92–95; calculator percent p.35</a:t>
+              <a:t>Textbook sections 6.1–6.3 pp.138–142; calculator percent p.55</a:t>
             </a:r>
           </a:p>
         </p:txBody>
@@ -12511,7 +12511,7 @@
                 </a:solidFill>
                 <a:latin typeface="Arial"/>
               </a:rPr>
-              <a:t>Textbook sections 6.1–6.3 pp.92–95; calculator percent p.35</a:t>
+              <a:t>Textbook sections 6.1–6.3 pp.138–142; calculator percent p.55</a:t>
             </a:r>
           </a:p>
         </p:txBody>
@@ -16549,7 +16549,7 @@
                 </a:solidFill>
                 <a:latin typeface="Arial"/>
               </a:rPr>
-              <a:t>Textbook sections 6.1–6.3 pp.92–95; calculator percent p.35</a:t>
+              <a:t>Textbook sections 6.1–6.3 pp.138–142; calculator percent p.55</a:t>
             </a:r>
           </a:p>
         </p:txBody>
@@ -16749,7 +16749,7 @@
                 </a:solidFill>
                 <a:latin typeface="Arial"/>
               </a:rPr>
-              <a:t>Resources: Exercise Book 6A Q1–10 (p.39); 6C Q1–2 (p.43)</a:t>
+              <a:t>Resources: Exercise Book 6A Q1–10 (p.55); 6C Q1–2 (p.59)</a:t>
             </a:r>
           </a:p>
         </p:txBody>
@@ -17363,7 +17363,7 @@
                 </a:solidFill>
                 <a:latin typeface="Arial"/>
               </a:rPr>
-              <a:t>Textbook sections 6.1–6.3 pp.92–95; calculator percent p.35</a:t>
+              <a:t>Textbook sections 6.1–6.3 pp.138–142; calculator percent p.55</a:t>
             </a:r>
           </a:p>
         </p:txBody>
@@ -18049,7 +18049,7 @@
                 </a:solidFill>
                 <a:latin typeface="Arial"/>
               </a:rPr>
-              <a:t>Textbook sections 6.1–6.3 pp.92–95; calculator percent p.35</a:t>
+              <a:t>Textbook sections 6.1–6.3 pp.138–142; calculator percent p.55</a:t>
             </a:r>
           </a:p>
         </p:txBody>
@@ -18735,7 +18735,7 @@
                 </a:solidFill>
                 <a:latin typeface="Arial"/>
               </a:rPr>
-              <a:t>Textbook sections 6.1–6.3 pp.92–95; calculator percent p.35</a:t>
+              <a:t>Textbook sections 6.1–6.3 pp.138–142; calculator percent p.55</a:t>
             </a:r>
           </a:p>
         </p:txBody>
@@ -18935,7 +18935,7 @@
                 </a:solidFill>
                 <a:latin typeface="Arial"/>
               </a:rPr>
-              <a:t>Resources: Exercise Book 6A Q1–10 (p.39); 6C Q1–2 (p.43)</a:t>
+              <a:t>Resources: Exercise Book 6A Q1–10 (p.55); 6C Q1–2 (p.59)</a:t>
             </a:r>
           </a:p>
         </p:txBody>
@@ -20214,7 +20214,7 @@
                 </a:solidFill>
                 <a:latin typeface="Arial"/>
               </a:rPr>
-              <a:t>Textbook sections 6.4 pp.96–97; review sections 5.7 pp.86–87</a:t>
+              <a:t>Textbook sections 6.4 pp.142–143; review sections 5.7 pp.124–132</a:t>
             </a:r>
           </a:p>
         </p:txBody>
@@ -20414,7 +20414,7 @@
                 </a:solidFill>
                 <a:latin typeface="Arial"/>
               </a:rPr>
-              <a:t>Textbook sections 6.4 pp.96–97; review sections 5.7 pp.86–87</a:t>
+              <a:t>Textbook sections 6.4 pp.142–143; review sections 5.7 pp.124–132</a:t>
             </a:r>
           </a:p>
         </p:txBody>
@@ -20462,7 +20462,7 @@
                 </a:solidFill>
                 <a:latin typeface="Arial"/>
               </a:rPr>
-              <a:t>Exercise Book 6A Q11–13 (pp.39–40); 6B Q1–3,5 (p.41)</a:t>
+              <a:t>Exercise Book 6A Q11–13 (p.56); 6B Q1–3,5 (p.57)</a:t>
             </a:r>
           </a:p>
         </p:txBody>
@@ -21124,7 +21124,7 @@
                 </a:solidFill>
                 <a:latin typeface="Arial"/>
               </a:rPr>
-              <a:t>Textbook sections 6.4 pp.96–97; review sections 5.7 pp.86–87</a:t>
+              <a:t>Textbook sections 6.4 pp.142–143; review sections 5.7 pp.124–132</a:t>
             </a:r>
           </a:p>
         </p:txBody>
@@ -21324,7 +21324,7 @@
                 </a:solidFill>
                 <a:latin typeface="Arial"/>
               </a:rPr>
-              <a:t>Resources: Exercise Book 6A Q11–13 (pp.39–40); 6B Q1–3,5 (p.41)</a:t>
+              <a:t>Resources: Exercise Book 6A Q11–13 (p.56); 6B Q1–3,5 (p.57)</a:t>
             </a:r>
           </a:p>
         </p:txBody>
@@ -22073,7 +22073,7 @@
                 </a:solidFill>
                 <a:latin typeface="Arial"/>
               </a:rPr>
-              <a:t>Textbook sections 6.4 pp.96–97; review sections 5.7 pp.86–87</a:t>
+              <a:t>Textbook sections 6.4 pp.142–143; review sections 5.7 pp.124–132</a:t>
             </a:r>
           </a:p>
         </p:txBody>
@@ -23318,7 +23318,7 @@
                 </a:solidFill>
                 <a:latin typeface="Arial"/>
               </a:rPr>
-              <a:t>Textbook sections 6.4 pp.96–97; review sections 5.7 pp.86–87</a:t>
+              <a:t>Textbook sections 6.4 pp.142–143; review sections 5.7 pp.124–132</a:t>
             </a:r>
           </a:p>
         </p:txBody>
@@ -25249,7 +25249,7 @@
                 </a:solidFill>
                 <a:latin typeface="Arial"/>
               </a:rPr>
-              <a:t>Textbook sections 6.1–6.3 pp.92–95; calculator percent p.35</a:t>
+              <a:t>Textbook sections 6.1–6.3 pp.138–142; calculator percent p.55</a:t>
             </a:r>
           </a:p>
         </p:txBody>
@@ -25449,7 +25449,7 @@
                 </a:solidFill>
                 <a:latin typeface="Arial"/>
               </a:rPr>
-              <a:t>Textbook sections 6.1–6.3 pp.92–95; calculator percent p.35</a:t>
+              <a:t>Textbook sections 6.1–6.3 pp.138–142; calculator percent p.55</a:t>
             </a:r>
           </a:p>
         </p:txBody>
@@ -25497,7 +25497,7 @@
                 </a:solidFill>
                 <a:latin typeface="Arial"/>
               </a:rPr>
-              <a:t>Exercise Book 6A Q1–10 (p.39); 6C Q1–2 (p.43)</a:t>
+              <a:t>Exercise Book 6A Q1–10 (p.55); 6C Q1–2 (p.59)</a:t>
             </a:r>
           </a:p>
         </p:txBody>
@@ -26111,7 +26111,7 @@
                 </a:solidFill>
                 <a:latin typeface="Arial"/>
               </a:rPr>
-              <a:t>Textbook  |  page 96</a:t>
+              <a:t>Textbook  |  page 142</a:t>
             </a:r>
           </a:p>
         </p:txBody>
@@ -26159,7 +26159,7 @@
                 </a:solidFill>
                 <a:latin typeface="Arial"/>
               </a:rPr>
-              <a:t>Textbook sections 6.4 pp.96–97; review sections 5.7 pp.86–87</a:t>
+              <a:t>Textbook sections 6.4 pp.142–143; review sections 5.7 pp.124–132</a:t>
             </a:r>
           </a:p>
         </p:txBody>
@@ -26231,7 +26231,7 @@
                 </a:solidFill>
                 <a:latin typeface="Arial"/>
               </a:rPr>
-              <a:t>Textbook p.96 • Example 6.5 — Allowance and whole purchase lengths</a:t>
+              <a:t>Textbook p.142 • Example 6.5 — Allowance and whole purchase lengths</a:t>
             </a:r>
           </a:p>
         </p:txBody>
@@ -26797,7 +26797,7 @@
                 </a:solidFill>
                 <a:latin typeface="Arial"/>
               </a:rPr>
-              <a:t>Textbook  |  page 96</a:t>
+              <a:t>Textbook  |  page 142</a:t>
             </a:r>
           </a:p>
         </p:txBody>
@@ -26845,7 +26845,7 @@
                 </a:solidFill>
                 <a:latin typeface="Arial"/>
               </a:rPr>
-              <a:t>Textbook sections 6.4 pp.96–97; review sections 5.7 pp.86–87</a:t>
+              <a:t>Textbook sections 6.4 pp.142–143; review sections 5.7 pp.124–132</a:t>
             </a:r>
           </a:p>
         </p:txBody>
@@ -26917,7 +26917,7 @@
                 </a:solidFill>
                 <a:latin typeface="Arial"/>
               </a:rPr>
-              <a:t>Textbook p.96 • Example 6.5 — Calculator check and final order</a:t>
+              <a:t>Textbook p.142 • Example 6.5 — Calculator check and final order</a:t>
             </a:r>
           </a:p>
         </p:txBody>
@@ -27531,7 +27531,7 @@
                 </a:solidFill>
                 <a:latin typeface="Arial"/>
               </a:rPr>
-              <a:t>Textbook sections 6.4 pp.96–97; review sections 5.7 pp.86–87</a:t>
+              <a:t>Textbook sections 6.4 pp.142–143; review sections 5.7 pp.124–132</a:t>
             </a:r>
           </a:p>
         </p:txBody>
@@ -28289,7 +28289,7 @@
                 </a:solidFill>
                 <a:latin typeface="Arial"/>
               </a:rPr>
-              <a:t>Textbook sections 6.4 pp.96–97; review sections 5.7 pp.86–87</a:t>
+              <a:t>Textbook sections 6.4 pp.142–143; review sections 5.7 pp.124–132</a:t>
             </a:r>
           </a:p>
         </p:txBody>
@@ -28489,7 +28489,7 @@
                 </a:solidFill>
                 <a:latin typeface="Arial"/>
               </a:rPr>
-              <a:t>Resources: Exercise Book 6A Q11–13 (pp.39–40); 6B Q1–3,5 (p.41)</a:t>
+              <a:t>Resources: Exercise Book 6A Q11–13 (p.56); 6B Q1–3,5 (p.57)</a:t>
             </a:r>
           </a:p>
         </p:txBody>
@@ -29103,7 +29103,7 @@
                 </a:solidFill>
                 <a:latin typeface="Arial"/>
               </a:rPr>
-              <a:t>Textbook sections 6.4 pp.96–97; review sections 5.7 pp.86–87</a:t>
+              <a:t>Textbook sections 6.4 pp.142–143; review sections 5.7 pp.124–132</a:t>
             </a:r>
           </a:p>
         </p:txBody>
@@ -29859,7 +29859,7 @@
                 </a:solidFill>
                 <a:latin typeface="Arial"/>
               </a:rPr>
-              <a:t>Textbook sections 6.4 pp.96–97; review sections 5.7 pp.86–87</a:t>
+              <a:t>Textbook sections 6.4 pp.142–143; review sections 5.7 pp.124–132</a:t>
             </a:r>
           </a:p>
         </p:txBody>
@@ -30593,7 +30593,7 @@
                 </a:solidFill>
                 <a:latin typeface="Arial"/>
               </a:rPr>
-              <a:t>Textbook sections 6.4 pp.96–97; review sections 5.7 pp.86–87</a:t>
+              <a:t>Textbook sections 6.4 pp.142–143; review sections 5.7 pp.124–132</a:t>
             </a:r>
           </a:p>
         </p:txBody>
@@ -30793,7 +30793,7 @@
                 </a:solidFill>
                 <a:latin typeface="Arial"/>
               </a:rPr>
-              <a:t>Resources: Exercise Book 6A Q11–13 (pp.39–40); 6B Q1–3,5 (p.41)</a:t>
+              <a:t>Resources: Exercise Book 6A Q11–13 (p.56); 6B Q1–3,5 (p.57)</a:t>
             </a:r>
           </a:p>
         </p:txBody>
@@ -31407,7 +31407,7 @@
                 </a:solidFill>
                 <a:latin typeface="Arial"/>
               </a:rPr>
-              <a:t>Textbook sections 6.4 pp.96–97; review sections 5.7 pp.86–87</a:t>
+              <a:t>Textbook sections 6.4 pp.142–143; review sections 5.7 pp.124–132</a:t>
             </a:r>
           </a:p>
         </p:txBody>
@@ -32183,7 +32183,7 @@
                 </a:solidFill>
                 <a:latin typeface="Arial"/>
               </a:rPr>
-              <a:t>Textbook sections 6.4 pp.96–97; review sections 5.7 pp.86–87</a:t>
+              <a:t>Textbook sections 6.4 pp.142–143; review sections 5.7 pp.124–132</a:t>
             </a:r>
           </a:p>
         </p:txBody>
@@ -33142,7 +33142,7 @@
                 </a:solidFill>
                 <a:latin typeface="Arial"/>
               </a:rPr>
-              <a:t>Textbook sections 6.4 pp.96–97; review sections 5.7 pp.86–87</a:t>
+              <a:t>Textbook sections 6.4 pp.142–143; review sections 5.7 pp.124–132</a:t>
             </a:r>
           </a:p>
         </p:txBody>
@@ -33853,7 +33853,7 @@
                 </a:solidFill>
                 <a:latin typeface="Arial"/>
               </a:rPr>
-              <a:t>Textbook sections 6.1–6.3 pp.92–95; calculator percent p.35</a:t>
+              <a:t>Textbook sections 6.1–6.3 pp.138–142; calculator percent p.55</a:t>
             </a:r>
           </a:p>
         </p:txBody>
@@ -34053,7 +34053,7 @@
                 </a:solidFill>
                 <a:latin typeface="Arial"/>
               </a:rPr>
-              <a:t>Resources: Exercise Book 6A Q1–10 (p.39); 6C Q1–2 (p.43)</a:t>
+              <a:t>Resources: Exercise Book 6A Q1–10 (p.55); 6C Q1–2 (p.59)</a:t>
             </a:r>
           </a:p>
         </p:txBody>
@@ -34667,7 +34667,7 @@
                 </a:solidFill>
                 <a:latin typeface="Arial"/>
               </a:rPr>
-              <a:t>Textbook sections 6.4 pp.96–97; review sections 5.7 pp.86–87</a:t>
+              <a:t>Textbook sections 6.4 pp.142–143; review sections 5.7 pp.124–132</a:t>
             </a:r>
           </a:p>
         </p:txBody>
@@ -35378,7 +35378,7 @@
                 </a:solidFill>
                 <a:latin typeface="Arial"/>
               </a:rPr>
-              <a:t>Textbook sections 6.4 pp.96–97; review sections 5.7 pp.86–87</a:t>
+              <a:t>Textbook sections 6.4 pp.142–143; review sections 5.7 pp.124–132</a:t>
             </a:r>
           </a:p>
         </p:txBody>
@@ -35578,7 +35578,7 @@
                 </a:solidFill>
                 <a:latin typeface="Arial"/>
               </a:rPr>
-              <a:t>Resources: Exercise Book 6A Q11–13 (pp.39–40); 6B Q1–3,5 (p.41)</a:t>
+              <a:t>Resources: Exercise Book 6A Q11–13 (p.56); 6B Q1–3,5 (p.57)</a:t>
             </a:r>
           </a:p>
         </p:txBody>
@@ -36192,7 +36192,7 @@
                 </a:solidFill>
                 <a:latin typeface="Arial"/>
               </a:rPr>
-              <a:t>Textbook sections 6.4 pp.96–97; review sections 5.7 pp.86–87</a:t>
+              <a:t>Textbook sections 6.4 pp.142–143; review sections 5.7 pp.124–132</a:t>
             </a:r>
           </a:p>
         </p:txBody>
@@ -36903,7 +36903,7 @@
                 </a:solidFill>
                 <a:latin typeface="Arial"/>
               </a:rPr>
-              <a:t>Textbook sections 6.4 pp.96–97; review sections 5.7 pp.86–87</a:t>
+              <a:t>Textbook sections 6.4 pp.142–143; review sections 5.7 pp.124–132</a:t>
             </a:r>
           </a:p>
         </p:txBody>
@@ -37589,7 +37589,7 @@
                 </a:solidFill>
                 <a:latin typeface="Arial"/>
               </a:rPr>
-              <a:t>Textbook sections 6.4 pp.96–97; review sections 5.7 pp.86–87</a:t>
+              <a:t>Textbook sections 6.4 pp.142–143; review sections 5.7 pp.124–132</a:t>
             </a:r>
           </a:p>
         </p:txBody>
@@ -37789,7 +37789,7 @@
                 </a:solidFill>
                 <a:latin typeface="Arial"/>
               </a:rPr>
-              <a:t>Resources: Exercise Book 6A Q11–13 (pp.39–40); 6B Q1–3,5 (p.41)</a:t>
+              <a:t>Resources: Exercise Book 6A Q11–13 (p.56); 6B Q1–3,5 (p.57)</a:t>
             </a:r>
           </a:p>
         </p:txBody>
@@ -38403,7 +38403,7 @@
                 </a:solidFill>
                 <a:latin typeface="Arial"/>
               </a:rPr>
-              <a:t>Textbook sections 6.1–6.3 pp.92–95; calculator percent p.35</a:t>
+              <a:t>Textbook sections 6.1–6.3 pp.138–142; calculator percent p.55</a:t>
             </a:r>
           </a:p>
         </p:txBody>
@@ -39224,7 +39224,7 @@
                 </a:solidFill>
                 <a:latin typeface="Arial"/>
               </a:rPr>
-              <a:t>Textbook sections 6.1–6.3 pp.92–95; calculator percent p.35</a:t>
+              <a:t>Textbook sections 6.1–6.3 pp.138–142; calculator percent p.55</a:t>
             </a:r>
           </a:p>
         </p:txBody>
@@ -40469,7 +40469,7 @@
                 </a:solidFill>
                 <a:latin typeface="Arial"/>
               </a:rPr>
-              <a:t>Textbook sections 6.1–6.3 pp.92–95; calculator percent p.35</a:t>
+              <a:t>Textbook sections 6.1–6.3 pp.138–142; calculator percent p.55</a:t>
             </a:r>
           </a:p>
         </p:txBody>
@@ -42311,7 +42311,7 @@
                 </a:solidFill>
                 <a:latin typeface="Arial"/>
               </a:rPr>
-              <a:t>Textbook  |  page 94</a:t>
+              <a:t>Textbook  |  page 140</a:t>
             </a:r>
           </a:p>
         </p:txBody>
@@ -42359,7 +42359,7 @@
                 </a:solidFill>
                 <a:latin typeface="Arial"/>
               </a:rPr>
-              <a:t>Textbook sections 6.1–6.3 pp.92–95; calculator percent p.35</a:t>
+              <a:t>Textbook sections 6.1–6.3 pp.138–142; calculator percent p.55</a:t>
             </a:r>
           </a:p>
         </p:txBody>
@@ -42431,7 +42431,7 @@
                 </a:solidFill>
                 <a:latin typeface="Arial"/>
               </a:rPr>
-              <a:t>Textbook p.94 • Example 6.3 — Find a percent of a quantity</a:t>
+              <a:t>Textbook p.140 • Example 6.3 — Find a percent of a quantity</a:t>
             </a:r>
           </a:p>
         </p:txBody>

--- a/carpentry/intake-142/PowerPoint/Day-12_2026-11-18_Week-4.pptx
+++ b/carpentry/intake-142/PowerPoint/Day-12_2026-11-18_Week-4.pptx
@@ -19208,6 +19208,104 @@
           </a:p>
         </p:txBody>
       </p:sp>
+      <p:sp>
+        <p:nvSpPr>
+          <p:cNvPr id="22" name="Play quiz W04-L05"/>
+          <p:cNvSpPr txBox="1"/>
+          <p:nvPr/>
+        </p:nvSpPr>
+        <p:spPr>
+          <a:xfrm>
+            <a:off x="6355080" y="6606540"/>
+            <a:ext cx="822960" cy="210312"/>
+          </a:xfrm>
+          <a:prstGeom prst="rect">
+            <a:avLst/>
+          </a:prstGeom>
+          <a:noFill/>
+        </p:spPr>
+        <p:txBody>
+          <a:bodyPr wrap="square" lIns="0" rIns="0" tIns="0" bIns="0" anchor="t">
+            <a:normAutofit fontScale="100000" lnSpcReduction="0"/>
+          </a:bodyPr>
+          <a:lstStyle/>
+          <a:p>
+            <a:pPr>
+              <a:spcBef>
+                <a:spcPts val="0"/>
+              </a:spcBef>
+              <a:spcAft>
+                <a:spcPts val="0"/>
+              </a:spcAft>
+              <a:defRPr sz="1000" b="0">
+                <a:solidFill>
+                  <a:srgbClr val="D0002B"/>
+                </a:solidFill>
+                <a:latin typeface="Arial"/>
+              </a:defRPr>
+            </a:pPr>
+            <a:r>
+              <a:rPr sz="1000">
+                <a:solidFill>
+                  <a:srgbClr val="F7F8FC"/>
+                </a:solidFill>
+                <a:latin typeface="Arial"/>
+                <a:hlinkClick r:id="rId8"/>
+              </a:rPr>
+              <a:t>Play quiz</a:t>
+            </a:r>
+          </a:p>
+        </p:txBody>
+      </p:sp>
+      <p:sp>
+        <p:nvSpPr>
+          <p:cNvPr id="23" name="Quiz PDF W04-L05"/>
+          <p:cNvSpPr txBox="1"/>
+          <p:nvPr/>
+        </p:nvSpPr>
+        <p:spPr>
+          <a:xfrm>
+            <a:off x="7296912" y="6606540"/>
+            <a:ext cx="1005840" cy="210312"/>
+          </a:xfrm>
+          <a:prstGeom prst="rect">
+            <a:avLst/>
+          </a:prstGeom>
+          <a:noFill/>
+        </p:spPr>
+        <p:txBody>
+          <a:bodyPr wrap="square" lIns="0" rIns="0" tIns="0" bIns="0" anchor="t">
+            <a:normAutofit fontScale="100000" lnSpcReduction="0"/>
+          </a:bodyPr>
+          <a:lstStyle/>
+          <a:p>
+            <a:pPr>
+              <a:spcBef>
+                <a:spcPts val="0"/>
+              </a:spcBef>
+              <a:spcAft>
+                <a:spcPts val="0"/>
+              </a:spcAft>
+              <a:defRPr sz="1000" b="0">
+                <a:solidFill>
+                  <a:srgbClr val="D0002B"/>
+                </a:solidFill>
+                <a:latin typeface="Arial"/>
+              </a:defRPr>
+            </a:pPr>
+            <a:r>
+              <a:rPr sz="1000">
+                <a:solidFill>
+                  <a:srgbClr val="F7F8FC"/>
+                </a:solidFill>
+                <a:latin typeface="Arial"/>
+                <a:hlinkClick r:id="rId9"/>
+              </a:rPr>
+              <a:t>Quiz PDF</a:t>
+            </a:r>
+          </a:p>
+        </p:txBody>
+      </p:sp>
     </p:spTree>
   </p:cSld>
   <p:clrMapOvr>
@@ -38058,6 +38156,104 @@
                 <a:latin typeface="Arial"/>
               </a:rPr>
               <a:t>Day 12  •  2026-11-18  •  44</a:t>
+            </a:r>
+          </a:p>
+        </p:txBody>
+      </p:sp>
+      <p:sp>
+        <p:nvSpPr>
+          <p:cNvPr id="22" name="Play quiz W04-L06"/>
+          <p:cNvSpPr txBox="1"/>
+          <p:nvPr/>
+        </p:nvSpPr>
+        <p:spPr>
+          <a:xfrm>
+            <a:off x="6355080" y="6606540"/>
+            <a:ext cx="822960" cy="210312"/>
+          </a:xfrm>
+          <a:prstGeom prst="rect">
+            <a:avLst/>
+          </a:prstGeom>
+          <a:noFill/>
+        </p:spPr>
+        <p:txBody>
+          <a:bodyPr wrap="square" lIns="0" rIns="0" tIns="0" bIns="0" anchor="t">
+            <a:normAutofit fontScale="100000" lnSpcReduction="0"/>
+          </a:bodyPr>
+          <a:lstStyle/>
+          <a:p>
+            <a:pPr>
+              <a:spcBef>
+                <a:spcPts val="0"/>
+              </a:spcBef>
+              <a:spcAft>
+                <a:spcPts val="0"/>
+              </a:spcAft>
+              <a:defRPr sz="1000" b="0">
+                <a:solidFill>
+                  <a:srgbClr val="D0002B"/>
+                </a:solidFill>
+                <a:latin typeface="Arial"/>
+              </a:defRPr>
+            </a:pPr>
+            <a:r>
+              <a:rPr sz="1000">
+                <a:solidFill>
+                  <a:srgbClr val="F7F8FC"/>
+                </a:solidFill>
+                <a:latin typeface="Arial"/>
+                <a:hlinkClick r:id="rId8"/>
+              </a:rPr>
+              <a:t>Play quiz</a:t>
+            </a:r>
+          </a:p>
+        </p:txBody>
+      </p:sp>
+      <p:sp>
+        <p:nvSpPr>
+          <p:cNvPr id="23" name="Quiz PDF W04-L06"/>
+          <p:cNvSpPr txBox="1"/>
+          <p:nvPr/>
+        </p:nvSpPr>
+        <p:spPr>
+          <a:xfrm>
+            <a:off x="7296912" y="6606540"/>
+            <a:ext cx="1005840" cy="210312"/>
+          </a:xfrm>
+          <a:prstGeom prst="rect">
+            <a:avLst/>
+          </a:prstGeom>
+          <a:noFill/>
+        </p:spPr>
+        <p:txBody>
+          <a:bodyPr wrap="square" lIns="0" rIns="0" tIns="0" bIns="0" anchor="t">
+            <a:normAutofit fontScale="100000" lnSpcReduction="0"/>
+          </a:bodyPr>
+          <a:lstStyle/>
+          <a:p>
+            <a:pPr>
+              <a:spcBef>
+                <a:spcPts val="0"/>
+              </a:spcBef>
+              <a:spcAft>
+                <a:spcPts val="0"/>
+              </a:spcAft>
+              <a:defRPr sz="1000" b="0">
+                <a:solidFill>
+                  <a:srgbClr val="D0002B"/>
+                </a:solidFill>
+                <a:latin typeface="Arial"/>
+              </a:defRPr>
+            </a:pPr>
+            <a:r>
+              <a:rPr sz="1000">
+                <a:solidFill>
+                  <a:srgbClr val="F7F8FC"/>
+                </a:solidFill>
+                <a:latin typeface="Arial"/>
+                <a:hlinkClick r:id="rId9"/>
+              </a:rPr>
+              <a:t>Quiz PDF</a:t>
             </a:r>
           </a:p>
         </p:txBody>
